--- a/Projet 2026.pptx
+++ b/Projet 2026.pptx
@@ -5568,6 +5568,61 @@
           <a:p>
             <a:pPr algn="ctr"/>
             <a:endParaRPr lang="fr-FR"/>
+          </a:p>
+        </p:txBody>
+      </p:sp>
+      <p:sp>
+        <p:nvSpPr>
+          <p:cNvPr id="4" name="ZoneTexte 3">
+            <a:extLst>
+              <a:ext uri="{FF2B5EF4-FFF2-40B4-BE49-F238E27FC236}">
+                <a16:creationId xmlns:a16="http://schemas.microsoft.com/office/drawing/2014/main" id="{F545012E-48D9-B27B-EDAF-2ECBF46E0811}"/>
+              </a:ext>
+            </a:extLst>
+          </p:cNvPr>
+          <p:cNvSpPr txBox="1"/>
+          <p:nvPr/>
+        </p:nvSpPr>
+        <p:spPr>
+          <a:xfrm>
+            <a:off x="432000" y="1250709"/>
+            <a:ext cx="4572000" cy="338554"/>
+          </a:xfrm>
+          <a:prstGeom prst="rect">
+            <a:avLst/>
+          </a:prstGeom>
+          <a:noFill/>
+        </p:spPr>
+        <p:txBody>
+          <a:bodyPr wrap="square">
+            <a:spAutoFit/>
+          </a:bodyPr>
+          <a:lstStyle/>
+          <a:p>
+            <a:r>
+              <a:rPr lang="fr-FR" sz="1600" dirty="0" err="1">
+                <a:latin typeface="Bahnschrift Light" panose="020B0502040204020203" pitchFamily="34" charset="0"/>
+                <a:hlinkClick r:id="rId5"/>
+              </a:rPr>
+              <a:t>MaximeDehondt</a:t>
+            </a:r>
+            <a:r>
+              <a:rPr lang="fr-FR" sz="1600" dirty="0">
+                <a:latin typeface="Bahnschrift Light" panose="020B0502040204020203" pitchFamily="34" charset="0"/>
+                <a:hlinkClick r:id="rId5"/>
+              </a:rPr>
+              <a:t>/</a:t>
+            </a:r>
+            <a:r>
+              <a:rPr lang="fr-FR" sz="1600" dirty="0" err="1">
+                <a:latin typeface="Bahnschrift Light" panose="020B0502040204020203" pitchFamily="34" charset="0"/>
+                <a:hlinkClick r:id="rId5"/>
+              </a:rPr>
+              <a:t>projet_polytech_imds</a:t>
+            </a:r>
+            <a:endParaRPr lang="fr-FR" sz="1600" dirty="0">
+              <a:latin typeface="Bahnschrift Light" panose="020B0502040204020203" pitchFamily="34" charset="0"/>
+            </a:endParaRPr>
           </a:p>
         </p:txBody>
       </p:sp>
@@ -6704,6 +6759,21 @@
 </file>
 
 <file path=customXml/item1.xml><?xml version="1.0" encoding="utf-8"?>
+<p:properties xmlns:p="http://schemas.microsoft.com/office/2006/metadata/properties" xmlns:xsi="http://www.w3.org/2001/XMLSchema-instance" xmlns:pc="http://schemas.microsoft.com/office/infopath/2007/PartnerControls">
+  <documentManagement>
+    <SharedWithUsers xmlns="0c560703-3b21-48fe-9195-a362533443b3">
+      <UserInfo>
+        <DisplayName/>
+        <AccountId xsi:nil="true"/>
+        <AccountType/>
+      </UserInfo>
+    </SharedWithUsers>
+    <MediaLengthInSeconds xmlns="cdc1e2e2-ba5b-43bc-aa0d-1c140e038227" xsi:nil="true"/>
+  </documentManagement>
+</p:properties>
+</file>
+
+<file path=customXml/item2.xml><?xml version="1.0" encoding="utf-8"?>
 <ct:contentTypeSchema xmlns:ct="http://schemas.microsoft.com/office/2006/metadata/contentType" xmlns:ma="http://schemas.microsoft.com/office/2006/metadata/properties/metaAttributes" ct:_="" ma:_="" ma:contentTypeName="Document" ma:contentTypeID="0x01010017201571100B21448FB104199A283E90" ma:contentTypeVersion="10" ma:contentTypeDescription="Create a new document." ma:contentTypeScope="" ma:versionID="c2e2607327ff419bc91fd8018e331f6a">
   <xsd:schema xmlns:xsd="http://www.w3.org/2001/XMLSchema" xmlns:xs="http://www.w3.org/2001/XMLSchema" xmlns:p="http://schemas.microsoft.com/office/2006/metadata/properties" xmlns:ns2="cdc1e2e2-ba5b-43bc-aa0d-1c140e038227" xmlns:ns3="0c560703-3b21-48fe-9195-a362533443b3" targetNamespace="http://schemas.microsoft.com/office/2006/metadata/properties" ma:root="true" ma:fieldsID="69be636535b59d4b876842cbdf7b73e6" ns2:_="" ns3:_="">
     <xsd:import namespace="cdc1e2e2-ba5b-43bc-aa0d-1c140e038227"/>
@@ -6904,21 +6974,6 @@
 </ct:contentTypeSchema>
 </file>
 
-<file path=customXml/item2.xml><?xml version="1.0" encoding="utf-8"?>
-<p:properties xmlns:p="http://schemas.microsoft.com/office/2006/metadata/properties" xmlns:xsi="http://www.w3.org/2001/XMLSchema-instance" xmlns:pc="http://schemas.microsoft.com/office/infopath/2007/PartnerControls">
-  <documentManagement>
-    <SharedWithUsers xmlns="0c560703-3b21-48fe-9195-a362533443b3">
-      <UserInfo>
-        <DisplayName/>
-        <AccountId xsi:nil="true"/>
-        <AccountType/>
-      </UserInfo>
-    </SharedWithUsers>
-    <MediaLengthInSeconds xmlns="cdc1e2e2-ba5b-43bc-aa0d-1c140e038227" xsi:nil="true"/>
-  </documentManagement>
-</p:properties>
-</file>
-
 <file path=customXml/item3.xml><?xml version="1.0" encoding="utf-8"?>
 <?mso-contentType ?>
 <FormTemplates xmlns="http://schemas.microsoft.com/sharepoint/v3/contenttype/forms">
@@ -6929,6 +6984,24 @@
 </file>
 
 <file path=customXml/itemProps1.xml><?xml version="1.0" encoding="utf-8"?>
+<ds:datastoreItem xmlns:ds="http://schemas.openxmlformats.org/officeDocument/2006/customXml" ds:itemID="{B977837A-7943-4B33-9C62-11BEEED10B31}">
+  <ds:schemaRefs>
+    <ds:schemaRef ds:uri="http://purl.org/dc/terms/"/>
+    <ds:schemaRef ds:uri="http://schemas.openxmlformats.org/package/2006/metadata/core-properties"/>
+    <ds:schemaRef ds:uri="http://schemas.microsoft.com/office/2006/documentManagement/types"/>
+    <ds:schemaRef ds:uri="http://schemas.microsoft.com/office/infopath/2007/PartnerControls"/>
+    <ds:schemaRef ds:uri="http://purl.org/dc/elements/1.1/"/>
+    <ds:schemaRef ds:uri="http://schemas.microsoft.com/office/2006/metadata/properties"/>
+    <ds:schemaRef ds:uri="691c30cb-37d2-4866-85d3-09d4385d971d"/>
+    <ds:schemaRef ds:uri="http://www.w3.org/XML/1998/namespace"/>
+    <ds:schemaRef ds:uri="http://purl.org/dc/dcmitype/"/>
+    <ds:schemaRef ds:uri="0c560703-3b21-48fe-9195-a362533443b3"/>
+    <ds:schemaRef ds:uri="cdc1e2e2-ba5b-43bc-aa0d-1c140e038227"/>
+  </ds:schemaRefs>
+</ds:datastoreItem>
+</file>
+
+<file path=customXml/itemProps2.xml><?xml version="1.0" encoding="utf-8"?>
 <ds:datastoreItem xmlns:ds="http://schemas.openxmlformats.org/officeDocument/2006/customXml" ds:itemID="{035DC7D0-63D5-437E-B55B-14F1C16048BF}">
   <ds:schemaRefs>
     <ds:schemaRef ds:uri="http://schemas.microsoft.com/office/2006/metadata/contentType"/>
@@ -6947,24 +7020,6 @@
 </ds:datastoreItem>
 </file>
 
-<file path=customXml/itemProps2.xml><?xml version="1.0" encoding="utf-8"?>
-<ds:datastoreItem xmlns:ds="http://schemas.openxmlformats.org/officeDocument/2006/customXml" ds:itemID="{B977837A-7943-4B33-9C62-11BEEED10B31}">
-  <ds:schemaRefs>
-    <ds:schemaRef ds:uri="http://purl.org/dc/terms/"/>
-    <ds:schemaRef ds:uri="http://schemas.openxmlformats.org/package/2006/metadata/core-properties"/>
-    <ds:schemaRef ds:uri="http://schemas.microsoft.com/office/2006/documentManagement/types"/>
-    <ds:schemaRef ds:uri="http://schemas.microsoft.com/office/infopath/2007/PartnerControls"/>
-    <ds:schemaRef ds:uri="http://purl.org/dc/elements/1.1/"/>
-    <ds:schemaRef ds:uri="http://schemas.microsoft.com/office/2006/metadata/properties"/>
-    <ds:schemaRef ds:uri="691c30cb-37d2-4866-85d3-09d4385d971d"/>
-    <ds:schemaRef ds:uri="http://www.w3.org/XML/1998/namespace"/>
-    <ds:schemaRef ds:uri="http://purl.org/dc/dcmitype/"/>
-    <ds:schemaRef ds:uri="0c560703-3b21-48fe-9195-a362533443b3"/>
-    <ds:schemaRef ds:uri="cdc1e2e2-ba5b-43bc-aa0d-1c140e038227"/>
-  </ds:schemaRefs>
-</ds:datastoreItem>
-</file>
-
 <file path=customXml/itemProps3.xml><?xml version="1.0" encoding="utf-8"?>
 <ds:datastoreItem xmlns:ds="http://schemas.openxmlformats.org/officeDocument/2006/customXml" ds:itemID="{5A5ACAC1-F26B-4482-93E2-895159A5D714}">
   <ds:schemaRefs>

--- a/Projet 2026.pptx
+++ b/Projet 2026.pptx
@@ -5791,6 +5791,43 @@
                 <a:latin typeface="Bahnschrift SemiLight" panose="020B0502040204020203" pitchFamily="34" charset="0"/>
               </a:rPr>
               <a:t>Atteintes des objectifs</a:t>
+            </a:r>
+          </a:p>
+        </p:txBody>
+      </p:sp>
+      <p:sp>
+        <p:nvSpPr>
+          <p:cNvPr id="2" name="ZoneTexte 1">
+            <a:extLst>
+              <a:ext uri="{FF2B5EF4-FFF2-40B4-BE49-F238E27FC236}">
+                <a16:creationId xmlns:a16="http://schemas.microsoft.com/office/drawing/2014/main" id="{FC020862-A8CF-6A92-8AAA-5E05F1A5772F}"/>
+              </a:ext>
+            </a:extLst>
+          </p:cNvPr>
+          <p:cNvSpPr txBox="1"/>
+          <p:nvPr/>
+        </p:nvSpPr>
+        <p:spPr>
+          <a:xfrm>
+            <a:off x="482400" y="3974400"/>
+            <a:ext cx="8056800" cy="307777"/>
+          </a:xfrm>
+          <a:prstGeom prst="rect">
+            <a:avLst/>
+          </a:prstGeom>
+          <a:noFill/>
+        </p:spPr>
+        <p:txBody>
+          <a:bodyPr wrap="square" rtlCol="0">
+            <a:spAutoFit/>
+          </a:bodyPr>
+          <a:lstStyle/>
+          <a:p>
+            <a:r>
+              <a:rPr lang="fr-FR" sz="1400" dirty="0">
+                <a:latin typeface="Bahnschrift Light" panose="020B0502040204020203" pitchFamily="34" charset="0"/>
+              </a:rPr>
+              <a:t>maxime--pierre--guillaume.dehondt@michelin.com</a:t>
             </a:r>
           </a:p>
         </p:txBody>
